--- a/slides/13_bayes_nets.pptx
+++ b/slides/13_bayes_nets.pptx
@@ -5,7 +5,7 @@
     <p:sldMasterId id="2147483672" r:id="rId1"/>
   </p:sldMasterIdLst>
   <p:notesMasterIdLst>
-    <p:notesMasterId r:id="rId49"/>
+    <p:notesMasterId r:id="rId50"/>
   </p:notesMasterIdLst>
   <p:sldIdLst>
     <p:sldId id="294" r:id="rId2"/>
@@ -54,7 +54,8 @@
     <p:sldId id="320" r:id="rId45"/>
     <p:sldId id="321" r:id="rId46"/>
     <p:sldId id="409" r:id="rId47"/>
-    <p:sldId id="322" r:id="rId48"/>
+    <p:sldId id="486" r:id="rId48"/>
+    <p:sldId id="322" r:id="rId49"/>
   </p:sldIdLst>
   <p:sldSz cx="9144000" cy="6858000" type="screen4x3"/>
   <p:notesSz cx="7315200" cy="9601200"/>
@@ -228,6 +229,7 @@
             <p14:sldId id="320"/>
             <p14:sldId id="321"/>
             <p14:sldId id="409"/>
+            <p14:sldId id="486"/>
             <p14:sldId id="322"/>
           </p14:sldIdLst>
         </p14:section>
@@ -9287,7 +9289,7 @@
             <a:fld id="{71CA99E0-E95C-4F1B-B0F2-4565A2B40149}" type="datetimeFigureOut">
               <a:rPr lang="en-US" smtClean="0"/>
               <a:pPr/>
-              <a:t>4/20/2026</a:t>
+              <a:t>10/23/2026</a:t>
             </a:fld>
             <a:endParaRPr lang="en-US"/>
           </a:p>
@@ -16950,7 +16952,7 @@
                           <m:rPr>
                             <m:nor/>
                           </m:rPr>
-                          <a:rPr lang="en-US" sz="2000" dirty="0"/>
+                          <a:rPr lang="en-US" sz="2000" i="0" dirty="0"/>
                           <m:t> </m:t>
                         </m:r>
                       </m:e>
@@ -17766,7 +17768,7 @@
                     <m:f>
                       <m:fPr>
                         <m:ctrlPr>
-                          <a:rPr lang="en-US" sz="2000" i="1">
+                          <a:rPr lang="en-US" sz="2000" i="0">
                             <a:latin typeface="Cambria Math" panose="02040503050406030204" pitchFamily="18" charset="0"/>
                           </a:rPr>
                         </m:ctrlPr>
@@ -17776,145 +17778,10 @@
                           <m:rPr>
                             <m:nor/>
                           </m:rPr>
-                          <a:rPr lang="en-US" sz="2000">
+                          <a:rPr lang="en-US" sz="2000" i="0">
                             <a:latin typeface="Cambria Math" panose="02040503050406030204" pitchFamily="18" charset="0"/>
                           </a:rPr>
-                          <m:t>P</m:t>
-                        </m:r>
-                        <m:r>
-                          <m:rPr>
-                            <m:nor/>
-                          </m:rPr>
-                          <a:rPr lang="en-US" sz="2000">
-                            <a:latin typeface="Cambria Math" panose="02040503050406030204" pitchFamily="18" charset="0"/>
-                          </a:rPr>
-                          <m:t>(</m:t>
-                        </m:r>
-                        <m:r>
-                          <m:rPr>
-                            <m:nor/>
-                          </m:rPr>
-                          <a:rPr lang="en-US" sz="2000">
-                            <a:latin typeface="Cambria Math" panose="02040503050406030204" pitchFamily="18" charset="0"/>
-                          </a:rPr>
-                          <m:t>X</m:t>
-                        </m:r>
-                        <m:r>
-                          <m:rPr>
-                            <m:nor/>
-                          </m:rPr>
-                          <a:rPr lang="en-US" sz="2000">
-                            <a:latin typeface="Cambria Math" panose="02040503050406030204" pitchFamily="18" charset="0"/>
-                          </a:rPr>
-                          <m:t>)</m:t>
-                        </m:r>
-                        <m:r>
-                          <m:rPr>
-                            <m:nor/>
-                          </m:rPr>
-                          <a:rPr lang="en-US" sz="2000">
-                            <a:latin typeface="Cambria Math" panose="02040503050406030204" pitchFamily="18" charset="0"/>
-                          </a:rPr>
-                          <m:t>P</m:t>
-                        </m:r>
-                        <m:r>
-                          <m:rPr>
-                            <m:nor/>
-                          </m:rPr>
-                          <a:rPr lang="en-US" sz="2000">
-                            <a:latin typeface="Cambria Math" panose="02040503050406030204" pitchFamily="18" charset="0"/>
-                          </a:rPr>
-                          <m:t>(</m:t>
-                        </m:r>
-                        <m:r>
-                          <m:rPr>
-                            <m:nor/>
-                          </m:rPr>
-                          <a:rPr lang="en-US" sz="2000">
-                            <a:latin typeface="Cambria Math" panose="02040503050406030204" pitchFamily="18" charset="0"/>
-                          </a:rPr>
-                          <m:t>Y</m:t>
-                        </m:r>
-                        <m:r>
-                          <m:rPr>
-                            <m:nor/>
-                          </m:rPr>
-                          <a:rPr lang="en-US" sz="2000">
-                            <a:latin typeface="Cambria Math" panose="02040503050406030204" pitchFamily="18" charset="0"/>
-                          </a:rPr>
-                          <m:t>|</m:t>
-                        </m:r>
-                        <m:r>
-                          <m:rPr>
-                            <m:nor/>
-                          </m:rPr>
-                          <a:rPr lang="en-US" sz="2000">
-                            <a:latin typeface="Cambria Math" panose="02040503050406030204" pitchFamily="18" charset="0"/>
-                          </a:rPr>
-                          <m:t>X</m:t>
-                        </m:r>
-                        <m:r>
-                          <m:rPr>
-                            <m:nor/>
-                          </m:rPr>
-                          <a:rPr lang="en-US" sz="2000">
-                            <a:latin typeface="Cambria Math" panose="02040503050406030204" pitchFamily="18" charset="0"/>
-                          </a:rPr>
-                          <m:t>)</m:t>
-                        </m:r>
-                        <m:r>
-                          <m:rPr>
-                            <m:nor/>
-                          </m:rPr>
-                          <a:rPr lang="en-US" sz="2000">
-                            <a:latin typeface="Cambria Math" panose="02040503050406030204" pitchFamily="18" charset="0"/>
-                          </a:rPr>
-                          <m:t>P</m:t>
-                        </m:r>
-                        <m:r>
-                          <m:rPr>
-                            <m:nor/>
-                          </m:rPr>
-                          <a:rPr lang="en-US" sz="2000">
-                            <a:latin typeface="Cambria Math" panose="02040503050406030204" pitchFamily="18" charset="0"/>
-                          </a:rPr>
-                          <m:t>(</m:t>
-                        </m:r>
-                        <m:r>
-                          <m:rPr>
-                            <m:nor/>
-                          </m:rPr>
-                          <a:rPr lang="en-US" sz="2000">
-                            <a:latin typeface="Cambria Math" panose="02040503050406030204" pitchFamily="18" charset="0"/>
-                          </a:rPr>
-                          <m:t>Z</m:t>
-                        </m:r>
-                        <m:r>
-                          <m:rPr>
-                            <m:nor/>
-                          </m:rPr>
-                          <a:rPr lang="en-US" sz="2000">
-                            <a:latin typeface="Cambria Math" panose="02040503050406030204" pitchFamily="18" charset="0"/>
-                          </a:rPr>
-                          <m:t>|</m:t>
-                        </m:r>
-                        <m:r>
-                          <m:rPr>
-                            <m:nor/>
-                          </m:rPr>
-                          <a:rPr lang="en-US" sz="2000">
-                            <a:latin typeface="Cambria Math" panose="02040503050406030204" pitchFamily="18" charset="0"/>
-                          </a:rPr>
-                          <m:t>Y</m:t>
-                        </m:r>
-                        <m:r>
-                          <m:rPr>
-                            <m:nor/>
-                          </m:rPr>
-                          <a:rPr lang="en-US" sz="2000">
-                            <a:latin typeface="Cambria Math" panose="02040503050406030204" pitchFamily="18" charset="0"/>
-                          </a:rPr>
-                          <m:t>)</m:t>
+                          <m:t>P(X)P(Y|X)P(Z|Y)</m:t>
                         </m:r>
                       </m:num>
                       <m:den>
@@ -17948,7 +17815,7 @@
                       <m:rPr>
                         <m:nor/>
                       </m:rPr>
-                      <a:rPr lang="en-US" sz="2000">
+                      <a:rPr lang="en-US" sz="2000" i="0">
                         <a:latin typeface="Cambria Math" panose="02040503050406030204" pitchFamily="18" charset="0"/>
                       </a:rPr>
                       <m:t> </m:t>
@@ -17984,7 +17851,7 @@
                       <m:rPr>
                         <m:nor/>
                       </m:rPr>
-                      <a:rPr lang="en-US" sz="2000">
+                      <a:rPr lang="en-US" sz="2000" i="0">
                         <a:latin typeface="Cambria Math" panose="02040503050406030204" pitchFamily="18" charset="0"/>
                       </a:rPr>
                       <m:t>= </m:t>
@@ -18185,118 +18052,10 @@
                       <m:rPr>
                         <m:nor/>
                       </m:rPr>
-                      <a:rPr lang="en-US" sz="2000">
+                      <a:rPr lang="en-US" sz="2000" i="0">
                         <a:latin typeface="Cambria Math" panose="02040503050406030204" pitchFamily="18" charset="0"/>
                       </a:rPr>
-                      <m:t> = </m:t>
-                    </m:r>
-                    <m:r>
-                      <m:rPr>
-                        <m:nor/>
-                      </m:rPr>
-                      <a:rPr lang="en-US" sz="2000">
-                        <a:latin typeface="Cambria Math" panose="02040503050406030204" pitchFamily="18" charset="0"/>
-                      </a:rPr>
-                      <m:t>P</m:t>
-                    </m:r>
-                    <m:r>
-                      <m:rPr>
-                        <m:nor/>
-                      </m:rPr>
-                      <a:rPr lang="en-US" sz="2000">
-                        <a:latin typeface="Cambria Math" panose="02040503050406030204" pitchFamily="18" charset="0"/>
-                      </a:rPr>
-                      <m:t>(</m:t>
-                    </m:r>
-                    <m:r>
-                      <m:rPr>
-                        <m:nor/>
-                      </m:rPr>
-                      <a:rPr lang="en-US" sz="2000">
-                        <a:latin typeface="Cambria Math" panose="02040503050406030204" pitchFamily="18" charset="0"/>
-                      </a:rPr>
-                      <m:t>X</m:t>
-                    </m:r>
-                    <m:r>
-                      <m:rPr>
-                        <m:nor/>
-                      </m:rPr>
-                      <a:rPr lang="en-US" sz="2000">
-                        <a:latin typeface="Cambria Math" panose="02040503050406030204" pitchFamily="18" charset="0"/>
-                      </a:rPr>
-                      <m:t>|</m:t>
-                    </m:r>
-                    <m:r>
-                      <m:rPr>
-                        <m:nor/>
-                      </m:rPr>
-                      <a:rPr lang="en-US" sz="2000">
-                        <a:latin typeface="Cambria Math" panose="02040503050406030204" pitchFamily="18" charset="0"/>
-                      </a:rPr>
-                      <m:t>Y</m:t>
-                    </m:r>
-                    <m:r>
-                      <m:rPr>
-                        <m:nor/>
-                      </m:rPr>
-                      <a:rPr lang="en-US" sz="2000">
-                        <a:latin typeface="Cambria Math" panose="02040503050406030204" pitchFamily="18" charset="0"/>
-                      </a:rPr>
-                      <m:t>)</m:t>
-                    </m:r>
-                    <m:r>
-                      <m:rPr>
-                        <m:nor/>
-                      </m:rPr>
-                      <a:rPr lang="en-US" sz="2000">
-                        <a:latin typeface="Cambria Math" panose="02040503050406030204" pitchFamily="18" charset="0"/>
-                      </a:rPr>
-                      <m:t>P</m:t>
-                    </m:r>
-                    <m:r>
-                      <m:rPr>
-                        <m:nor/>
-                      </m:rPr>
-                      <a:rPr lang="en-US" sz="2000">
-                        <a:latin typeface="Cambria Math" panose="02040503050406030204" pitchFamily="18" charset="0"/>
-                      </a:rPr>
-                      <m:t>(</m:t>
-                    </m:r>
-                    <m:r>
-                      <m:rPr>
-                        <m:nor/>
-                      </m:rPr>
-                      <a:rPr lang="en-US" sz="2000">
-                        <a:latin typeface="Cambria Math" panose="02040503050406030204" pitchFamily="18" charset="0"/>
-                      </a:rPr>
-                      <m:t>Z</m:t>
-                    </m:r>
-                    <m:r>
-                      <m:rPr>
-                        <m:nor/>
-                      </m:rPr>
-                      <a:rPr lang="en-US" sz="2000">
-                        <a:latin typeface="Cambria Math" panose="02040503050406030204" pitchFamily="18" charset="0"/>
-                      </a:rPr>
-                      <m:t>|</m:t>
-                    </m:r>
-                    <m:r>
-                      <m:rPr>
-                        <m:nor/>
-                      </m:rPr>
-                      <a:rPr lang="en-US" sz="2000">
-                        <a:latin typeface="Cambria Math" panose="02040503050406030204" pitchFamily="18" charset="0"/>
-                      </a:rPr>
-                      <m:t>Y</m:t>
-                    </m:r>
-                    <m:r>
-                      <m:rPr>
-                        <m:nor/>
-                      </m:rPr>
-                      <a:rPr lang="en-US" sz="2000">
-                        <a:latin typeface="Cambria Math" panose="02040503050406030204" pitchFamily="18" charset="0"/>
-                      </a:rPr>
-                      <m:t>)</m:t>
+                      <m:t> = P(X|Y)P(Z|Y)</m:t>
                     </m:r>
                   </m:oMath>
                 </a14:m>
@@ -20618,10 +20377,7 @@
                 </a:br>
                 <a14:m>
                   <m:oMathPara xmlns:m="http://schemas.openxmlformats.org/officeDocument/2006/math">
-                    <m:oMathParaPr>
-                      <m:jc m:val="centerGroup"/>
-                    </m:oMathParaPr>
-                    <m:oMath xmlns:m="http://schemas.openxmlformats.org/officeDocument/2006/math">
+                    <m:oMath>
                       <m:r>
                         <a:rPr lang="en-US" sz="2000" i="1" dirty="0" smtClean="0">
                           <a:solidFill>
@@ -20852,10 +20608,7 @@
                     <a:pPr algn="ctr"/>
                     <a14:m>
                       <m:oMathPara xmlns:m="http://schemas.openxmlformats.org/officeDocument/2006/math">
-                        <m:oMathParaPr>
-                          <m:jc m:val="centerGroup"/>
-                        </m:oMathParaPr>
-                        <m:oMath xmlns:m="http://schemas.openxmlformats.org/officeDocument/2006/math">
+                        <m:oMath>
                           <m:r>
                             <a:rPr lang="en-US" sz="1400" i="1" dirty="0" smtClean="0">
                               <a:solidFill>
@@ -20976,10 +20729,7 @@
                     <a:pPr algn="ctr"/>
                     <a14:m>
                       <m:oMathPara xmlns:m="http://schemas.openxmlformats.org/officeDocument/2006/math">
-                        <m:oMathParaPr>
-                          <m:jc m:val="centerGroup"/>
-                        </m:oMathParaPr>
-                        <m:oMath xmlns:m="http://schemas.openxmlformats.org/officeDocument/2006/math">
+                        <m:oMath>
                           <m:r>
                             <a:rPr lang="en-US" sz="1400" i="1" dirty="0" smtClean="0">
                               <a:solidFill>
@@ -21100,10 +20850,7 @@
                     <a:pPr algn="ctr"/>
                     <a14:m>
                       <m:oMathPara xmlns:m="http://schemas.openxmlformats.org/officeDocument/2006/math">
-                        <m:oMathParaPr>
-                          <m:jc m:val="centerGroup"/>
-                        </m:oMathParaPr>
-                        <m:oMath xmlns:m="http://schemas.openxmlformats.org/officeDocument/2006/math">
+                        <m:oMath>
                           <m:r>
                             <a:rPr lang="en-US" sz="1400" i="1" dirty="0" smtClean="0">
                               <a:solidFill>
@@ -21344,10 +21091,7 @@
                     <a:pPr algn="ctr"/>
                     <a14:m>
                       <m:oMathPara xmlns:m="http://schemas.openxmlformats.org/officeDocument/2006/math">
-                        <m:oMathParaPr>
-                          <m:jc m:val="centerGroup"/>
-                        </m:oMathParaPr>
-                        <m:oMath xmlns:m="http://schemas.openxmlformats.org/officeDocument/2006/math">
+                        <m:oMath>
                           <m:r>
                             <a:rPr lang="en-US" i="1" dirty="0" smtClean="0">
                               <a:solidFill>
@@ -21466,10 +21210,7 @@
                     </a:pPr>
                     <a14:m>
                       <m:oMathPara xmlns:m="http://schemas.openxmlformats.org/officeDocument/2006/math">
-                        <m:oMathParaPr>
-                          <m:jc m:val="centerGroup"/>
-                        </m:oMathParaPr>
-                        <m:oMath xmlns:m="http://schemas.openxmlformats.org/officeDocument/2006/math">
+                        <m:oMath>
                           <m:r>
                             <a:rPr lang="en-US" sz="2200" i="1" dirty="0" smtClean="0">
                               <a:solidFill>
@@ -21990,7 +21731,7 @@
                     <m:sSub>
                       <m:sSubPr>
                         <m:ctrlPr>
-                          <a:rPr lang="en-US" sz="2400" b="0" i="1" dirty="0" smtClean="0">
+                          <a:rPr lang="en-US" sz="2400" i="1" dirty="0" smtClean="0">
                             <a:solidFill>
                               <a:srgbClr val="0066FF"/>
                             </a:solidFill>
@@ -22051,7 +21792,7 @@
                     <m:sSub>
                       <m:sSubPr>
                         <m:ctrlPr>
-                          <a:rPr lang="en-US" sz="2400" b="0" i="1" dirty="0" smtClean="0">
+                          <a:rPr lang="en-US" sz="2400" i="1" dirty="0">
                             <a:solidFill>
                               <a:srgbClr val="0066FF"/>
                             </a:solidFill>
@@ -22191,10 +21932,7 @@
                 </a:pPr>
                 <a14:m>
                   <m:oMathPara xmlns:m="http://schemas.openxmlformats.org/officeDocument/2006/math">
-                    <m:oMathParaPr>
-                      <m:jc m:val="centerGroup"/>
-                    </m:oMathParaPr>
-                    <m:oMath xmlns:m="http://schemas.openxmlformats.org/officeDocument/2006/math">
+                    <m:oMath>
                       <m:r>
                         <a:rPr lang="en-US" sz="2000" i="1" smtClean="0">
                           <a:solidFill>
@@ -22799,10 +22537,7 @@
                   </a:pPr>
                   <a14:m>
                     <m:oMathPara xmlns:m="http://schemas.openxmlformats.org/officeDocument/2006/math">
-                      <m:oMathParaPr>
-                        <m:jc m:val="centerGroup"/>
-                      </m:oMathParaPr>
-                      <m:oMath xmlns:m="http://schemas.openxmlformats.org/officeDocument/2006/math">
+                      <m:oMath>
                         <m:r>
                           <a:rPr lang="en-US" i="1" dirty="0" smtClean="0">
                             <a:latin typeface="Cambria Math" panose="02040503050406030204" pitchFamily="18" charset="0"/>
@@ -25032,7 +24767,7 @@
                         <m:sSub>
                           <m:sSubPr>
                             <m:ctrlPr>
-                              <a:rPr lang="en-US" sz="1800" b="0" i="1" smtClean="0">
+                              <a:rPr lang="en-US" sz="1800" b="0" i="0" smtClean="0">
                                 <a:latin typeface="Cambria Math" panose="02040503050406030204" pitchFamily="18" charset="0"/>
                               </a:rPr>
                             </m:ctrlPr>
@@ -25066,7 +24801,7 @@
                         <m:sSub>
                           <m:sSubPr>
                             <m:ctrlPr>
-                              <a:rPr lang="en-US" sz="1800" b="0" i="1" smtClean="0">
+                              <a:rPr lang="en-US" sz="1800" b="0" i="0" smtClean="0">
                                 <a:latin typeface="Cambria Math" panose="02040503050406030204" pitchFamily="18" charset="0"/>
                               </a:rPr>
                             </m:ctrlPr>
@@ -25100,7 +24835,7 @@
                         <m:sSub>
                           <m:sSubPr>
                             <m:ctrlPr>
-                              <a:rPr lang="en-US" sz="1800" b="0" i="1" smtClean="0">
+                              <a:rPr lang="en-US" sz="1800" b="0" i="0" smtClean="0">
                                 <a:latin typeface="Cambria Math" panose="02040503050406030204" pitchFamily="18" charset="0"/>
                               </a:rPr>
                             </m:ctrlPr>
@@ -25154,7 +24889,7 @@
                         <m:sSub>
                           <m:sSubPr>
                             <m:ctrlPr>
-                              <a:rPr lang="en-US" sz="1800" b="0" i="1" smtClean="0">
+                              <a:rPr lang="en-US" sz="1800" b="0" i="0" smtClean="0">
                                 <a:latin typeface="Cambria Math" panose="02040503050406030204" pitchFamily="18" charset="0"/>
                               </a:rPr>
                             </m:ctrlPr>
@@ -25199,7 +24934,7 @@
                         <m:sSub>
                           <m:sSubPr>
                             <m:ctrlPr>
-                              <a:rPr lang="en-US" sz="1800" b="0" i="1" smtClean="0">
+                              <a:rPr lang="en-US" sz="1800" b="0" i="0" smtClean="0">
                                 <a:latin typeface="Cambria Math" panose="02040503050406030204" pitchFamily="18" charset="0"/>
                               </a:rPr>
                             </m:ctrlPr>
@@ -25229,7 +24964,7 @@
                         <m:sSub>
                           <m:sSubPr>
                             <m:ctrlPr>
-                              <a:rPr lang="en-US" sz="1800" b="0" i="1" smtClean="0">
+                              <a:rPr lang="en-US" sz="1800" b="0" i="0" smtClean="0">
                                 <a:latin typeface="Cambria Math" panose="02040503050406030204" pitchFamily="18" charset="0"/>
                               </a:rPr>
                             </m:ctrlPr>
@@ -25274,7 +25009,7 @@
                         <m:sSub>
                           <m:sSubPr>
                             <m:ctrlPr>
-                              <a:rPr lang="en-US" sz="1800" b="0" i="1" smtClean="0">
+                              <a:rPr lang="en-US" sz="1800" b="0" i="0" smtClean="0">
                                 <a:latin typeface="Cambria Math" panose="02040503050406030204" pitchFamily="18" charset="0"/>
                               </a:rPr>
                             </m:ctrlPr>
@@ -25304,7 +25039,7 @@
                         <m:sSub>
                           <m:sSubPr>
                             <m:ctrlPr>
-                              <a:rPr lang="en-US" sz="1800" b="0" i="1" smtClean="0">
+                              <a:rPr lang="en-US" sz="1800" b="0" i="0" smtClean="0">
                                 <a:latin typeface="Cambria Math" panose="02040503050406030204" pitchFamily="18" charset="0"/>
                               </a:rPr>
                             </m:ctrlPr>
@@ -25338,7 +25073,7 @@
                         <m:sSub>
                           <m:sSubPr>
                             <m:ctrlPr>
-                              <a:rPr lang="en-US" sz="1800" b="0" i="1" smtClean="0">
+                              <a:rPr lang="en-US" sz="1800" b="0" i="0" smtClean="0">
                                 <a:latin typeface="Cambria Math" panose="02040503050406030204" pitchFamily="18" charset="0"/>
                               </a:rPr>
                             </m:ctrlPr>
@@ -26671,7 +26406,7 @@
                     <m:sSub>
                       <m:sSubPr>
                         <m:ctrlPr>
-                          <a:rPr lang="en-US" sz="2400" b="0" i="1" dirty="0" smtClean="0">
+                          <a:rPr lang="en-US" sz="2400" i="1" dirty="0">
                             <a:latin typeface="Cambria Math" panose="02040503050406030204" pitchFamily="18" charset="0"/>
                           </a:rPr>
                         </m:ctrlPr>
@@ -26731,7 +26466,7 @@
                     <m:sSub>
                       <m:sSubPr>
                         <m:ctrlPr>
-                          <a:rPr lang="en-US" sz="2400" b="0" i="1" dirty="0" smtClean="0">
+                          <a:rPr lang="en-US" sz="2400" i="1" dirty="0" smtClean="0">
                             <a:solidFill>
                               <a:srgbClr val="0066FF"/>
                             </a:solidFill>
@@ -26792,7 +26527,7 @@
                     <m:sSub>
                       <m:sSubPr>
                         <m:ctrlPr>
-                          <a:rPr lang="en-US" sz="2400" b="0" i="1" dirty="0" smtClean="0">
+                          <a:rPr lang="en-US" sz="2400" i="1" dirty="0">
                             <a:solidFill>
                               <a:srgbClr val="0066FF"/>
                             </a:solidFill>
@@ -26853,7 +26588,7 @@
                     <m:sSub>
                       <m:sSubPr>
                         <m:ctrlPr>
-                          <a:rPr lang="en-US" sz="2400" b="0" i="1" dirty="0" smtClean="0">
+                          <a:rPr lang="en-US" sz="2400" i="1" dirty="0">
                             <a:solidFill>
                               <a:srgbClr val="0066FF"/>
                             </a:solidFill>
@@ -26923,7 +26658,7 @@
                     <m:sSub>
                       <m:sSubPr>
                         <m:ctrlPr>
-                          <a:rPr lang="en-US" sz="2400" b="0" i="1" dirty="0" smtClean="0">
+                          <a:rPr lang="en-US" sz="2400" i="1" dirty="0">
                             <a:solidFill>
                               <a:srgbClr val="0066FF"/>
                             </a:solidFill>
@@ -27845,34 +27580,7 @@
                       <a:rPr lang="en-US" i="0" dirty="0" smtClean="0">
                         <a:latin typeface="Cambria Math" panose="02040503050406030204" pitchFamily="18" charset="0"/>
                       </a:rPr>
-                      <m:t>battery</m:t>
-                    </m:r>
-                    <m:r>
-                      <m:rPr>
-                        <m:nor/>
-                      </m:rPr>
-                      <a:rPr lang="en-US" i="0" dirty="0" smtClean="0">
-                        <a:latin typeface="Cambria Math" panose="02040503050406030204" pitchFamily="18" charset="0"/>
-                      </a:rPr>
-                      <m:t> </m:t>
-                    </m:r>
-                    <m:r>
-                      <m:rPr>
-                        <m:nor/>
-                      </m:rPr>
-                      <a:rPr lang="en-US" i="0" dirty="0" smtClean="0">
-                        <a:latin typeface="Cambria Math" panose="02040503050406030204" pitchFamily="18" charset="0"/>
-                      </a:rPr>
-                      <m:t>dead</m:t>
-                    </m:r>
-                    <m:r>
-                      <m:rPr>
-                        <m:nor/>
-                      </m:rPr>
-                      <a:rPr lang="en-US" i="0" dirty="0" smtClean="0">
-                        <a:latin typeface="Cambria Math" panose="02040503050406030204" pitchFamily="18" charset="0"/>
-                      </a:rPr>
-                      <m:t> </m:t>
+                      <m:t>battery dead </m:t>
                     </m:r>
                     <m:r>
                       <a:rPr lang="en-US" i="1" dirty="0" smtClean="0">
@@ -27887,61 +27595,7 @@
                       <a:rPr lang="en-US" i="0" dirty="0" smtClean="0">
                         <a:latin typeface="Cambria Math" panose="02040503050406030204" pitchFamily="18" charset="0"/>
                       </a:rPr>
-                      <m:t>car</m:t>
-                    </m:r>
-                    <m:r>
-                      <m:rPr>
-                        <m:nor/>
-                      </m:rPr>
-                      <a:rPr lang="en-US" i="0" dirty="0" smtClean="0">
-                        <a:latin typeface="Cambria Math" panose="02040503050406030204" pitchFamily="18" charset="0"/>
-                      </a:rPr>
-                      <m:t> </m:t>
-                    </m:r>
-                    <m:r>
-                      <m:rPr>
-                        <m:nor/>
-                      </m:rPr>
-                      <a:rPr lang="en-US" i="0" dirty="0" smtClean="0">
-                        <a:latin typeface="Cambria Math" panose="02040503050406030204" pitchFamily="18" charset="0"/>
-                      </a:rPr>
-                      <m:t>won</m:t>
-                    </m:r>
-                    <m:r>
-                      <m:rPr>
-                        <m:nor/>
-                      </m:rPr>
-                      <a:rPr lang="en-US" i="0" dirty="0" smtClean="0">
-                        <a:latin typeface="Cambria Math" panose="02040503050406030204" pitchFamily="18" charset="0"/>
-                      </a:rPr>
-                      <m:t>’</m:t>
-                    </m:r>
-                    <m:r>
-                      <m:rPr>
-                        <m:nor/>
-                      </m:rPr>
-                      <a:rPr lang="en-US" i="0" dirty="0" smtClean="0">
-                        <a:latin typeface="Cambria Math" panose="02040503050406030204" pitchFamily="18" charset="0"/>
-                      </a:rPr>
-                      <m:t>t</m:t>
-                    </m:r>
-                    <m:r>
-                      <m:rPr>
-                        <m:nor/>
-                      </m:rPr>
-                      <a:rPr lang="en-US" i="0" dirty="0" smtClean="0">
-                        <a:latin typeface="Cambria Math" panose="02040503050406030204" pitchFamily="18" charset="0"/>
-                      </a:rPr>
-                      <m:t> </m:t>
-                    </m:r>
-                    <m:r>
-                      <m:rPr>
-                        <m:nor/>
-                      </m:rPr>
-                      <a:rPr lang="en-US" i="0" dirty="0" smtClean="0">
-                        <a:latin typeface="Cambria Math" panose="02040503050406030204" pitchFamily="18" charset="0"/>
-                      </a:rPr>
-                      <m:t>start</m:t>
+                      <m:t>car won’t start</m:t>
                     </m:r>
                     <m:r>
                       <a:rPr lang="en-US" i="1" dirty="0" smtClean="0">
@@ -27976,25 +27630,7 @@
                       <a:rPr lang="en-US" b="0" i="0" dirty="0" smtClean="0">
                         <a:latin typeface="Cambria Math" panose="02040503050406030204" pitchFamily="18" charset="0"/>
                       </a:rPr>
-                      <m:t>starter</m:t>
-                    </m:r>
-                    <m:r>
-                      <m:rPr>
-                        <m:nor/>
-                      </m:rPr>
-                      <a:rPr lang="en-US" b="0" i="0" dirty="0" smtClean="0">
-                        <a:latin typeface="Cambria Math" panose="02040503050406030204" pitchFamily="18" charset="0"/>
-                      </a:rPr>
-                      <m:t> </m:t>
-                    </m:r>
-                    <m:r>
-                      <m:rPr>
-                        <m:nor/>
-                      </m:rPr>
-                      <a:rPr lang="en-US" b="0" i="0" dirty="0" smtClean="0">
-                        <a:latin typeface="Cambria Math" panose="02040503050406030204" pitchFamily="18" charset="0"/>
-                      </a:rPr>
-                      <m:t>broken</m:t>
+                      <m:t>starter broken</m:t>
                     </m:r>
                     <m:r>
                       <a:rPr lang="en-US" i="1" dirty="0">
@@ -28006,64 +27642,10 @@
                       <m:rPr>
                         <m:nor/>
                       </m:rPr>
-                      <a:rPr lang="en-US" dirty="0">
+                      <a:rPr lang="en-US" i="0" dirty="0">
                         <a:latin typeface="Cambria Math" panose="02040503050406030204" pitchFamily="18" charset="0"/>
                       </a:rPr>
-                      <m:t>car</m:t>
-                    </m:r>
-                    <m:r>
-                      <m:rPr>
-                        <m:nor/>
-                      </m:rPr>
-                      <a:rPr lang="en-US" dirty="0">
-                        <a:latin typeface="Cambria Math" panose="02040503050406030204" pitchFamily="18" charset="0"/>
-                      </a:rPr>
-                      <m:t> </m:t>
-                    </m:r>
-                    <m:r>
-                      <m:rPr>
-                        <m:nor/>
-                      </m:rPr>
-                      <a:rPr lang="en-US" dirty="0">
-                        <a:latin typeface="Cambria Math" panose="02040503050406030204" pitchFamily="18" charset="0"/>
-                      </a:rPr>
-                      <m:t>won</m:t>
-                    </m:r>
-                    <m:r>
-                      <m:rPr>
-                        <m:nor/>
-                      </m:rPr>
-                      <a:rPr lang="en-US" dirty="0">
-                        <a:latin typeface="Cambria Math" panose="02040503050406030204" pitchFamily="18" charset="0"/>
-                      </a:rPr>
-                      <m:t>’</m:t>
-                    </m:r>
-                    <m:r>
-                      <m:rPr>
-                        <m:nor/>
-                      </m:rPr>
-                      <a:rPr lang="en-US" dirty="0">
-                        <a:latin typeface="Cambria Math" panose="02040503050406030204" pitchFamily="18" charset="0"/>
-                      </a:rPr>
-                      <m:t>t</m:t>
-                    </m:r>
-                    <m:r>
-                      <m:rPr>
-                        <m:nor/>
-                      </m:rPr>
-                      <a:rPr lang="en-US" dirty="0">
-                        <a:latin typeface="Cambria Math" panose="02040503050406030204" pitchFamily="18" charset="0"/>
-                      </a:rPr>
-                      <m:t> </m:t>
-                    </m:r>
-                    <m:r>
-                      <m:rPr>
-                        <m:nor/>
-                      </m:rPr>
-                      <a:rPr lang="en-US" dirty="0">
-                        <a:latin typeface="Cambria Math" panose="02040503050406030204" pitchFamily="18" charset="0"/>
-                      </a:rPr>
-                      <m:t>start</m:t>
+                      <m:t>car won’t start</m:t>
                     </m:r>
                     <m:r>
                       <a:rPr lang="en-US" i="1" dirty="0">
@@ -30125,10 +29707,7 @@
                 </a:pPr>
                 <a14:m>
                   <m:oMathPara xmlns:m="http://schemas.openxmlformats.org/officeDocument/2006/math">
-                    <m:oMathParaPr>
-                      <m:jc m:val="centerGroup"/>
-                    </m:oMathParaPr>
-                    <m:oMath xmlns:m="http://schemas.openxmlformats.org/officeDocument/2006/math">
+                    <m:oMath>
                       <m:r>
                         <a:rPr lang="en-US" sz="2400" b="1" i="1" smtClean="0">
                           <a:solidFill>
@@ -30202,7 +29781,7 @@
                       <m:f>
                         <m:fPr>
                           <m:ctrlPr>
-                            <a:rPr lang="en-US" sz="2400" i="1">
+                            <a:rPr lang="en-US" sz="2400" b="1" i="1">
                               <a:solidFill>
                                 <a:srgbClr val="000000"/>
                               </a:solidFill>
@@ -30309,7 +29888,7 @@
                       <m:f>
                         <m:fPr>
                           <m:ctrlPr>
-                            <a:rPr lang="en-US" sz="2400" b="0" i="1" smtClean="0">
+                            <a:rPr lang="en-US" sz="2400" i="1">
                               <a:solidFill>
                                 <a:srgbClr val="000000"/>
                               </a:solidFill>
@@ -30472,7 +30051,7 @@
                           <m:chr m:val="∑"/>
                           <m:supHide m:val="on"/>
                           <m:ctrlPr>
-                            <a:rPr lang="en-US" sz="2400" i="1">
+                            <a:rPr lang="en-US" sz="2400" b="0" i="1">
                               <a:solidFill>
                                 <a:srgbClr val="000000"/>
                               </a:solidFill>
@@ -31135,10 +30714,7 @@
                 </a:pPr>
                 <a14:m>
                   <m:oMathPara xmlns:m="http://schemas.openxmlformats.org/officeDocument/2006/math">
-                    <m:oMathParaPr>
-                      <m:jc m:val="centerGroup"/>
-                    </m:oMathParaPr>
-                    <m:oMath xmlns:m="http://schemas.openxmlformats.org/officeDocument/2006/math">
+                    <m:oMath>
                       <m:r>
                         <a:rPr lang="en-US" sz="2000" i="1" smtClean="0">
                           <a:solidFill>
@@ -31527,7 +31103,7 @@
                         </m:e>
                       </m:nary>
                     </m:oMath>
-                    <m:oMath xmlns:m="http://schemas.openxmlformats.org/officeDocument/2006/math">
+                    <m:oMath>
                       <m:r>
                         <a:rPr lang="en-US" sz="2000" i="1">
                           <a:solidFill>
@@ -31846,7 +31422,7 @@
                         </m:e>
                       </m:nary>
                     </m:oMath>
-                    <m:oMath xmlns:m="http://schemas.openxmlformats.org/officeDocument/2006/math">
+                    <m:oMath>
                       <m:r>
                         <a:rPr lang="en-US" sz="2000" i="1">
                           <a:solidFill>
@@ -32590,7 +32166,7 @@
                     <m:oMathParaPr>
                       <m:jc m:val="left"/>
                     </m:oMathParaPr>
-                    <m:oMath xmlns:m="http://schemas.openxmlformats.org/officeDocument/2006/math">
+                    <m:oMath>
                       <m:r>
                         <a:rPr lang="en-US" sz="2000" i="1" smtClean="0">
                           <a:solidFill>
@@ -33082,10 +32658,7 @@
                 <a:pPr/>
                 <a14:m>
                   <m:oMathPara xmlns:m="http://schemas.openxmlformats.org/officeDocument/2006/math">
-                    <m:oMathParaPr>
-                      <m:jc m:val="centerGroup"/>
-                    </m:oMathParaPr>
-                    <m:oMath xmlns:m="http://schemas.openxmlformats.org/officeDocument/2006/math">
+                    <m:oMath>
                       <m:nary>
                         <m:naryPr>
                           <m:chr m:val="∑"/>
@@ -33199,10 +32772,7 @@
                 <a:pPr/>
                 <a14:m>
                   <m:oMathPara xmlns:m="http://schemas.openxmlformats.org/officeDocument/2006/math">
-                    <m:oMathParaPr>
-                      <m:jc m:val="centerGroup"/>
-                    </m:oMathParaPr>
-                    <m:oMath xmlns:m="http://schemas.openxmlformats.org/officeDocument/2006/math">
+                    <m:oMath>
                       <m:nary>
                         <m:naryPr>
                           <m:chr m:val="∑"/>
@@ -33688,7 +33258,7 @@
                     <m:oMathParaPr>
                       <m:jc m:val="left"/>
                     </m:oMathParaPr>
-                    <m:oMath xmlns:m="http://schemas.openxmlformats.org/officeDocument/2006/math">
+                    <m:oMath>
                       <m:r>
                         <a:rPr lang="en-US" sz="2400" b="1" i="1">
                           <a:solidFill>
@@ -33764,7 +33334,7 @@
                       <m:f>
                         <m:fPr>
                           <m:ctrlPr>
-                            <a:rPr lang="en-US" sz="2400" i="1">
+                            <a:rPr lang="en-US" sz="2400" b="1" i="1">
                               <a:solidFill>
                                 <a:srgbClr val="000000"/>
                               </a:solidFill>
@@ -33881,7 +33451,7 @@
                           <m:chr m:val="∑"/>
                           <m:supHide m:val="on"/>
                           <m:ctrlPr>
-                            <a:rPr lang="en-US" sz="2400" i="1">
+                            <a:rPr lang="en-US" sz="2400" b="0" i="1">
                               <a:solidFill>
                                 <a:srgbClr val="000000"/>
                               </a:solidFill>
@@ -36813,10 +36383,7 @@
                 </a:pPr>
                 <a14:m>
                   <m:oMathPara xmlns:m="http://schemas.openxmlformats.org/officeDocument/2006/math">
-                    <m:oMathParaPr>
-                      <m:jc m:val="centerGroup"/>
-                    </m:oMathParaPr>
-                    <m:oMath xmlns:m="http://schemas.openxmlformats.org/officeDocument/2006/math">
+                    <m:oMath>
                       <m:acc>
                         <m:accPr>
                           <m:chr m:val="̂"/>
@@ -36942,7 +36509,7 @@
                       <m:f>
                         <m:fPr>
                           <m:ctrlPr>
-                            <a:rPr lang="en-US" sz="2800" b="0" i="1" smtClean="0">
+                            <a:rPr lang="en-US" sz="2800" i="1">
                               <a:latin typeface="Cambria Math" panose="02040503050406030204" pitchFamily="18" charset="0"/>
                             </a:rPr>
                           </m:ctrlPr>
@@ -37136,10 +36703,7 @@
                 </a:pPr>
                 <a14:m>
                   <m:oMathPara xmlns:m="http://schemas.openxmlformats.org/officeDocument/2006/math">
-                    <m:oMathParaPr>
-                      <m:jc m:val="centerGroup"/>
-                    </m:oMathParaPr>
-                    <m:oMath xmlns:m="http://schemas.openxmlformats.org/officeDocument/2006/math">
+                    <m:oMath>
                       <m:acc>
                         <m:accPr>
                           <m:chr m:val="̂"/>
@@ -37203,7 +36767,7 @@
                       <m:f>
                         <m:fPr>
                           <m:ctrlPr>
-                            <a:rPr lang="en-US" sz="2800" b="0" i="1" smtClean="0">
+                            <a:rPr lang="en-US" sz="2800" i="1">
                               <a:latin typeface="Cambria Math" panose="02040503050406030204" pitchFamily="18" charset="0"/>
                             </a:rPr>
                           </m:ctrlPr>
@@ -38481,10 +38045,7 @@
                 </a:pPr>
                 <a14:m>
                   <m:oMathPara xmlns:m="http://schemas.openxmlformats.org/officeDocument/2006/math">
-                    <m:oMathParaPr>
-                      <m:jc m:val="centerGroup"/>
-                    </m:oMathParaPr>
-                    <m:oMath xmlns:m="http://schemas.openxmlformats.org/officeDocument/2006/math">
+                    <m:oMath>
                       <m:acc>
                         <m:accPr>
                           <m:chr m:val="̂"/>
@@ -38550,7 +38111,7 @@
                           <m:sSub>
                             <m:sSubPr>
                               <m:ctrlPr>
-                                <a:rPr lang="en-US" i="1">
+                                <a:rPr lang="en-US" b="1" i="1">
                                   <a:latin typeface="Cambria Math" panose="02040503050406030204" pitchFamily="18" charset="0"/>
                                 </a:rPr>
                               </m:ctrlPr>
@@ -38632,7 +38193,7 @@
                           <m:d>
                             <m:dPr>
                               <m:ctrlPr>
-                                <a:rPr lang="en-US" i="1">
+                                <a:rPr lang="en-US" b="1" i="1">
                                   <a:latin typeface="Cambria Math" panose="02040503050406030204" pitchFamily="18" charset="0"/>
                                 </a:rPr>
                               </m:ctrlPr>
@@ -38663,7 +38224,7 @@
                       <m:sSub>
                         <m:sSubPr>
                           <m:ctrlPr>
-                            <a:rPr lang="en-US" i="1">
+                            <a:rPr lang="en-US" b="1" i="1">
                               <a:latin typeface="Cambria Math" panose="02040503050406030204" pitchFamily="18" charset="0"/>
                             </a:rPr>
                           </m:ctrlPr>
@@ -39769,10 +39330,7 @@
                 </a:pPr>
                 <a14:m>
                   <m:oMathPara xmlns:m="http://schemas.openxmlformats.org/officeDocument/2006/math">
-                    <m:oMathParaPr>
-                      <m:jc m:val="centerGroup"/>
-                    </m:oMathParaPr>
-                    <m:oMath xmlns:m="http://schemas.openxmlformats.org/officeDocument/2006/math">
+                    <m:oMath>
                       <m:sSub>
                         <m:sSubPr>
                           <m:ctrlPr>
@@ -39871,10 +39429,7 @@
                 </a:pPr>
                 <a14:m>
                   <m:oMathPara xmlns:m="http://schemas.openxmlformats.org/officeDocument/2006/math">
-                    <m:oMathParaPr>
-                      <m:jc m:val="centerGroup"/>
-                    </m:oMathParaPr>
-                    <m:oMath xmlns:m="http://schemas.openxmlformats.org/officeDocument/2006/math">
+                    <m:oMath>
                       <m:r>
                         <a:rPr lang="en-US" sz="2400" b="0" i="1" smtClean="0">
                           <a:latin typeface="Cambria Math" panose="02040503050406030204" pitchFamily="18" charset="0"/>
@@ -40001,10 +39556,7 @@
                 </a:pPr>
                 <a14:m>
                   <m:oMathPara xmlns:m="http://schemas.openxmlformats.org/officeDocument/2006/math">
-                    <m:oMathParaPr>
-                      <m:jc m:val="centerGroup"/>
-                    </m:oMathParaPr>
-                    <m:oMath xmlns:m="http://schemas.openxmlformats.org/officeDocument/2006/math">
+                    <m:oMath>
                       <m:r>
                         <a:rPr lang="en-US" sz="2400" b="0" i="1" smtClean="0">
                           <a:latin typeface="Cambria Math" panose="02040503050406030204" pitchFamily="18" charset="0"/>
@@ -42334,10 +41886,7 @@
                 </a:pPr>
                 <a14:m>
                   <m:oMathPara xmlns:m="http://schemas.openxmlformats.org/officeDocument/2006/math">
-                    <m:oMathParaPr>
-                      <m:jc m:val="centerGroup"/>
-                    </m:oMathParaPr>
-                    <m:oMath xmlns:m="http://schemas.openxmlformats.org/officeDocument/2006/math">
+                    <m:oMath>
                       <m:r>
                         <a:rPr lang="en-US" sz="1800" b="0" i="1" smtClean="0">
                           <a:latin typeface="Cambria Math" panose="02040503050406030204" pitchFamily="18" charset="0"/>
@@ -42574,7 +42123,7 @@
                             <a:rPr lang="en-US" sz="1800" b="0" i="1" smtClean="0">
                               <a:latin typeface="Cambria Math" panose="02040503050406030204" pitchFamily="18" charset="0"/>
                             </a:rPr>
-                            <m:t>𝑐h𝑖𝑙𝑑𝑟𝑒𝑛</m:t>
+                            <m:t>𝑐ℎ𝑖𝑙𝑑𝑟𝑒𝑛</m:t>
                           </m:r>
                           <m:r>
                             <a:rPr lang="en-US" sz="1800" b="0" i="1" smtClean="0">
@@ -43142,10 +42691,7 @@
                 </a:pPr>
                 <a14:m>
                   <m:oMathPara xmlns:m="http://schemas.openxmlformats.org/officeDocument/2006/math">
-                    <m:oMathParaPr>
-                      <m:jc m:val="centerGroup"/>
-                    </m:oMathParaPr>
-                    <m:oMath xmlns:m="http://schemas.openxmlformats.org/officeDocument/2006/math">
+                    <m:oMath>
                       <m:r>
                         <a:rPr lang="en-US" sz="1700" i="1" dirty="0" smtClean="0">
                           <a:latin typeface="Cambria Math" panose="02040503050406030204" pitchFamily="18" charset="0"/>
@@ -43496,10 +43042,7 @@
                 </a:br>
                 <a14:m>
                   <m:oMathPara xmlns:m="http://schemas.openxmlformats.org/officeDocument/2006/math">
-                    <m:oMathParaPr>
-                      <m:jc m:val="centerGroup"/>
-                    </m:oMathParaPr>
-                    <m:oMath xmlns:m="http://schemas.openxmlformats.org/officeDocument/2006/math">
+                    <m:oMath>
                       <m:r>
                         <a:rPr lang="en-US" sz="1700" i="1" dirty="0" smtClean="0">
                           <a:latin typeface="Cambria Math" panose="02040503050406030204" pitchFamily="18" charset="0"/>
@@ -43520,7 +43063,7 @@
                               <m:begChr m:val="⟨"/>
                               <m:endChr m:val="⟩"/>
                               <m:ctrlPr>
-                                <a:rPr lang="en-US" sz="1700" i="1" dirty="0" smtClean="0">
+                                <a:rPr lang="en-US" sz="1700" b="0" i="1" dirty="0" smtClean="0">
                                   <a:latin typeface="Cambria Math" panose="02040503050406030204" pitchFamily="18" charset="0"/>
                                 </a:rPr>
                               </m:ctrlPr>
@@ -43559,7 +43102,7 @@
                           <m:begChr m:val="⟨"/>
                           <m:endChr m:val="⟩"/>
                           <m:ctrlPr>
-                            <a:rPr lang="en-US" sz="1700" i="1" dirty="0" smtClean="0">
+                            <a:rPr lang="en-US" sz="1700" i="1" dirty="0">
                               <a:latin typeface="Cambria Math" panose="02040503050406030204" pitchFamily="18" charset="0"/>
                             </a:rPr>
                           </m:ctrlPr>
@@ -44821,6 +44364,149 @@
 </file>
 
 <file path=ppt/slides/slide47.xml><?xml version="1.0" encoding="utf-8"?>
+<p:sld xmlns:a="http://schemas.openxmlformats.org/drawingml/2006/main" xmlns:r="http://schemas.openxmlformats.org/officeDocument/2006/relationships" xmlns:p="http://schemas.openxmlformats.org/presentationml/2006/main">
+  <p:cSld>
+    <p:spTree>
+      <p:nvGrpSpPr>
+        <p:cNvPr id="1" name=""/>
+        <p:cNvGrpSpPr/>
+        <p:nvPr/>
+      </p:nvGrpSpPr>
+      <p:grpSpPr>
+        <a:xfrm>
+          <a:off x="0" y="0"/>
+          <a:ext cx="0" cy="0"/>
+          <a:chOff x="0" y="0"/>
+          <a:chExt cx="0" cy="0"/>
+        </a:xfrm>
+      </p:grpSpPr>
+      <p:sp>
+        <p:nvSpPr>
+          <p:cNvPr id="4" name="Title 3">
+            <a:extLst>
+              <a:ext uri="{FF2B5EF4-FFF2-40B4-BE49-F238E27FC236}">
+                <a16:creationId xmlns:a16="http://schemas.microsoft.com/office/drawing/2014/main" id="{24CD2877-1046-6123-CF1E-BE9F2D8536CB}"/>
+              </a:ext>
+            </a:extLst>
+          </p:cNvPr>
+          <p:cNvSpPr>
+            <a:spLocks noGrp="1"/>
+          </p:cNvSpPr>
+          <p:nvPr>
+            <p:ph type="title"/>
+          </p:nvPr>
+        </p:nvSpPr>
+        <p:spPr>
+          <a:xfrm>
+            <a:off x="829115" y="2931914"/>
+            <a:ext cx="7886700" cy="876035"/>
+          </a:xfrm>
+        </p:spPr>
+        <p:txBody>
+          <a:bodyPr>
+            <a:noAutofit/>
+          </a:bodyPr>
+          <a:lstStyle/>
+          <a:p>
+            <a:r>
+              <a:rPr lang="en-US" sz="3200" b="1" dirty="0">
+                <a:latin typeface="+mn-lt"/>
+              </a:rPr>
+              <a:t>Code example</a:t>
+            </a:r>
+            <a:r>
+              <a:rPr lang="en-US" sz="3200" dirty="0">
+                <a:latin typeface="+mn-lt"/>
+              </a:rPr>
+              <a:t>: </a:t>
+            </a:r>
+            <a:br>
+              <a:rPr lang="en-US" sz="3200">
+                <a:latin typeface="+mn-lt"/>
+              </a:rPr>
+            </a:br>
+            <a:r>
+              <a:rPr lang="en-US" sz="3200">
+                <a:latin typeface="+mn-lt"/>
+              </a:rPr>
+              <a:t>The Alarm </a:t>
+            </a:r>
+            <a:r>
+              <a:rPr lang="en-US" sz="3200" dirty="0">
+                <a:latin typeface="+mn-lt"/>
+              </a:rPr>
+              <a:t>Example as a Bayesian Network </a:t>
+            </a:r>
+            <a:br>
+              <a:rPr lang="en-US" sz="3200" dirty="0">
+                <a:latin typeface="+mn-lt"/>
+              </a:rPr>
+            </a:br>
+            <a:endParaRPr lang="en-US" sz="3200" dirty="0">
+              <a:latin typeface="+mn-lt"/>
+            </a:endParaRPr>
+          </a:p>
+        </p:txBody>
+      </p:sp>
+      <p:sp>
+        <p:nvSpPr>
+          <p:cNvPr id="5" name="TextBox 4">
+            <a:extLst>
+              <a:ext uri="{FF2B5EF4-FFF2-40B4-BE49-F238E27FC236}">
+                <a16:creationId xmlns:a16="http://schemas.microsoft.com/office/drawing/2014/main" id="{5AA484FF-058C-4694-424C-0B3B26DF9F45}"/>
+              </a:ext>
+            </a:extLst>
+          </p:cNvPr>
+          <p:cNvSpPr txBox="1"/>
+          <p:nvPr/>
+        </p:nvSpPr>
+        <p:spPr>
+          <a:xfrm>
+            <a:off x="893299" y="5365946"/>
+            <a:ext cx="6608298" cy="253916"/>
+          </a:xfrm>
+          <a:prstGeom prst="rect">
+            <a:avLst/>
+          </a:prstGeom>
+          <a:noFill/>
+        </p:spPr>
+        <p:txBody>
+          <a:bodyPr wrap="square" rtlCol="0">
+            <a:spAutoFit/>
+          </a:bodyPr>
+          <a:lstStyle/>
+          <a:p>
+            <a:r>
+              <a:rPr lang="en-US" sz="1050" dirty="0"/>
+              <a:t>See Code on </a:t>
+            </a:r>
+            <a:r>
+              <a:rPr lang="en-US" sz="1050" dirty="0">
+                <a:hlinkClick r:id="rId2"/>
+              </a:rPr>
+              <a:t>https://michael.hahsler.net/Introduction_to_Artificial_Intelligence/</a:t>
+            </a:r>
+            <a:r>
+              <a:rPr lang="en-US" sz="1050" dirty="0"/>
+              <a:t> </a:t>
+            </a:r>
+          </a:p>
+        </p:txBody>
+      </p:sp>
+    </p:spTree>
+    <p:extLst>
+      <p:ext uri="{BB962C8B-B14F-4D97-AF65-F5344CB8AC3E}">
+        <p14:creationId xmlns:p14="http://schemas.microsoft.com/office/powerpoint/2010/main" val="190193640"/>
+      </p:ext>
+    </p:extLst>
+  </p:cSld>
+  <p:clrMapOvr>
+    <a:masterClrMapping/>
+  </p:clrMapOvr>
+</p:sld>
+</file>
+
+<file path=ppt/slides/slide48.xml><?xml version="1.0" encoding="utf-8"?>
 <p:sld xmlns:a="http://schemas.openxmlformats.org/drawingml/2006/main" xmlns:r="http://schemas.openxmlformats.org/officeDocument/2006/relationships" xmlns:p="http://schemas.openxmlformats.org/presentationml/2006/main">
   <p:cSld>
     <p:bg>
@@ -47048,10 +46734,7 @@
                 </a:pPr>
                 <a14:m>
                   <m:oMathPara xmlns:m="http://schemas.openxmlformats.org/officeDocument/2006/math">
-                    <m:oMathParaPr>
-                      <m:jc m:val="centerGroup"/>
-                    </m:oMathParaPr>
-                    <m:oMath xmlns:m="http://schemas.openxmlformats.org/officeDocument/2006/math">
+                    <m:oMath>
                       <m:r>
                         <a:rPr lang="en-US" b="0" i="1" smtClean="0">
                           <a:latin typeface="Cambria Math" panose="02040503050406030204" pitchFamily="18" charset="0"/>
@@ -47985,10 +47668,7 @@
                   <a:pPr algn="ctr"/>
                   <a14:m>
                     <m:oMathPara xmlns:m="http://schemas.openxmlformats.org/officeDocument/2006/math">
-                      <m:oMathParaPr>
-                        <m:jc m:val="centerGroup"/>
-                      </m:oMathParaPr>
-                      <m:oMath xmlns:m="http://schemas.openxmlformats.org/officeDocument/2006/math">
+                      <m:oMath>
                         <m:r>
                           <a:rPr lang="en-US" i="1" dirty="0" smtClean="0">
                             <a:solidFill>
@@ -48109,10 +47789,7 @@
                   <a:pPr algn="ctr"/>
                   <a14:m>
                     <m:oMathPara xmlns:m="http://schemas.openxmlformats.org/officeDocument/2006/math">
-                      <m:oMathParaPr>
-                        <m:jc m:val="centerGroup"/>
-                      </m:oMathParaPr>
-                      <m:oMath xmlns:m="http://schemas.openxmlformats.org/officeDocument/2006/math">
+                      <m:oMath>
                         <m:r>
                           <a:rPr lang="en-US" i="1" dirty="0" smtClean="0">
                             <a:solidFill>
@@ -48233,10 +47910,7 @@
                   <a:pPr algn="ctr"/>
                   <a14:m>
                     <m:oMathPara xmlns:m="http://schemas.openxmlformats.org/officeDocument/2006/math">
-                      <m:oMathParaPr>
-                        <m:jc m:val="centerGroup"/>
-                      </m:oMathParaPr>
-                      <m:oMath xmlns:m="http://schemas.openxmlformats.org/officeDocument/2006/math">
+                      <m:oMath>
                         <m:r>
                           <a:rPr lang="en-US" i="1" dirty="0" smtClean="0">
                             <a:solidFill>
@@ -48385,10 +48059,7 @@
                   <a:pPr algn="ctr"/>
                   <a14:m>
                     <m:oMathPara xmlns:m="http://schemas.openxmlformats.org/officeDocument/2006/math">
-                      <m:oMathParaPr>
-                        <m:jc m:val="centerGroup"/>
-                      </m:oMathParaPr>
-                      <m:oMath xmlns:m="http://schemas.openxmlformats.org/officeDocument/2006/math">
+                      <m:oMath>
                         <m:r>
                           <a:rPr lang="en-US" sz="2400" i="1" baseline="-25000" dirty="0" smtClean="0">
                             <a:solidFill>
@@ -48612,10 +48283,7 @@
                 </a:pPr>
                 <a14:m>
                   <m:oMathPara xmlns:m="http://schemas.openxmlformats.org/officeDocument/2006/math">
-                    <m:oMathParaPr>
-                      <m:jc m:val="centerGroup"/>
-                    </m:oMathParaPr>
-                    <m:oMath xmlns:m="http://schemas.openxmlformats.org/officeDocument/2006/math">
+                    <m:oMath>
                       <m:r>
                         <a:rPr lang="en-US" b="0" i="1" smtClean="0">
                           <a:latin typeface="Cambria Math" panose="02040503050406030204" pitchFamily="18" charset="0"/>
